--- a/docs/病歴・状態タブ_操作マニュアル.pptx
+++ b/docs/病歴・状態タブ_操作マニュアル.pptx
@@ -4461,7 +4461,7 @@
             <a:avLst/>
           </a:prstGeom>
           <a:solidFill>
-            <a:srgbClr val="E2F0EC"/>
+            <a:srgbClr val="FBEAE2"/>
           </a:solidFill>
           <a:ln>
             <a:noFill/>
@@ -4505,7 +4505,7 @@
             <a:avLst/>
           </a:prstGeom>
           <a:solidFill>
-            <a:srgbClr val="0E8A78"/>
+            <a:srgbClr val="E2714A"/>
           </a:solidFill>
           <a:ln>
             <a:noFill/>
@@ -4567,11 +4567,11 @@
             <a:r>
               <a:rPr sz="1300" b="1">
                 <a:solidFill>
-                  <a:srgbClr val="0E8A78"/>
+                  <a:srgbClr val="E2714A"/>
                 </a:solidFill>
                 <a:latin typeface="Meiryo UI"/>
               </a:rPr>
-              <a:t>自動保存について</a:t>
+              <a:t>⚠️ 自動保存はありません</a:t>
             </a:r>
           </a:p>
           <a:p>
@@ -4590,7 +4590,7 @@
                 </a:solidFill>
                 <a:latin typeface="Meiryo UI"/>
               </a:rPr>
-              <a:t>入力内容は1.2秒後に自動的に保存されます。「保存」ボタンを押さなくても大丈夫です。ただし医療文書の読み取り結果は「病歴欄に反映」ボタンを押すまで保存されません。</a:t>
+              <a:t>入力したら必ず「保存する」ボタンを押してください。未保存の間は「未保存の変更があります」と表示されます。医療文書の読み取り結果は「病歴欄に反映」ボタンを押すまで反映されません。</a:t>
             </a:r>
           </a:p>
         </p:txBody>
@@ -6956,7 +6956,7 @@
                 </a:solidFill>
                 <a:latin typeface="Meiryo UI"/>
               </a:rPr>
-              <a:t>読み取り結果は画面表示のみです。病歴テキストに反映するには「病歴欄に反映」ボタンを押してください。反映後は1.2秒後に自動保存されます。</a:t>
+              <a:t>読み取り結果は画面表示のみです。病歴テキストに反映するには「病歴欄に反映」ボタンを押してください。反映後は「保存する」を押すまで保存されません。</a:t>
             </a:r>
           </a:p>
         </p:txBody>
